--- a/Final Presentation/Parking Slides - 22072026.pptx
+++ b/Final Presentation/Parking Slides - 22072026.pptx
@@ -1243,7 +1243,7 @@
           <a:p>
             <a:fld id="{C840ECD8-D6A2-4DE1-BE36-29929AE0EA08}" type="datetimeFigureOut">
               <a:rPr lang="LID4096" smtClean="0"/>
-              <a:t>07/22/2026</a:t>
+              <a:t>07/23/2026</a:t>
             </a:fld>
             <a:endParaRPr lang="LID4096"/>
           </a:p>
@@ -1421,7 +1421,7 @@
           <a:p>
             <a:fld id="{7FB1AAD6-495D-4C88-913E-6D77925F1DA4}" type="datetimeFigureOut">
               <a:rPr lang="en-US" smtClean="0"/>
-              <a:t>22/07/2026</a:t>
+              <a:t>23/07/2026</a:t>
             </a:fld>
             <a:endParaRPr lang="en-US"/>
           </a:p>
@@ -1924,7 +1924,7 @@
               <a:pPr>
                 <a:defRPr/>
               </a:pPr>
-              <a:t>22/07/2026</a:t>
+              <a:t>23/07/2026</a:t>
             </a:fld>
             <a:endParaRPr lang="en-US"/>
           </a:p>
@@ -2687,7 +2687,7 @@
               <a:pPr>
                 <a:defRPr/>
               </a:pPr>
-              <a:t>22/07/2026</a:t>
+              <a:t>23/07/2026</a:t>
             </a:fld>
             <a:endParaRPr lang="en-US"/>
           </a:p>
@@ -3069,7 +3069,7 @@
               <a:pPr>
                 <a:defRPr/>
               </a:pPr>
-              <a:t>22/07/2026</a:t>
+              <a:t>23/07/2026</a:t>
             </a:fld>
             <a:endParaRPr lang="en-US"/>
           </a:p>
@@ -3449,7 +3449,7 @@
               <a:pPr>
                 <a:defRPr/>
               </a:pPr>
-              <a:t>22/07/2026</a:t>
+              <a:t>23/07/2026</a:t>
             </a:fld>
             <a:endParaRPr lang="en-US"/>
           </a:p>
@@ -3977,7 +3977,7 @@
               <a:pPr>
                 <a:defRPr/>
               </a:pPr>
-              <a:t>22/07/2026</a:t>
+              <a:t>23/07/2026</a:t>
             </a:fld>
             <a:endParaRPr lang="en-US"/>
           </a:p>
@@ -4227,7 +4227,7 @@
               <a:pPr>
                 <a:defRPr/>
               </a:pPr>
-              <a:t>22/07/2026</a:t>
+              <a:t>23/07/2026</a:t>
             </a:fld>
             <a:endParaRPr lang="en-US"/>
           </a:p>
@@ -4441,7 +4441,7 @@
               <a:pPr>
                 <a:defRPr/>
               </a:pPr>
-              <a:t>22/07/2026</a:t>
+              <a:t>23/07/2026</a:t>
             </a:fld>
             <a:endParaRPr lang="en-US"/>
           </a:p>
@@ -4862,7 +4862,7 @@
               <a:pPr>
                 <a:defRPr/>
               </a:pPr>
-              <a:t>22/07/2026</a:t>
+              <a:t>23/07/2026</a:t>
             </a:fld>
             <a:endParaRPr lang="en-US"/>
           </a:p>
@@ -5263,7 +5263,7 @@
               <a:pPr>
                 <a:defRPr/>
               </a:pPr>
-              <a:t>22/07/2026</a:t>
+              <a:t>23/07/2026</a:t>
             </a:fld>
             <a:endParaRPr lang="en-US"/>
           </a:p>
@@ -7120,7 +7120,7 @@
         <p:spPr>
           <a:xfrm>
             <a:off x="219456" y="1563624"/>
-            <a:ext cx="2039112" cy="420624"/>
+            <a:ext cx="2039112" cy="307777"/>
           </a:xfrm>
           <a:prstGeom prst="rect">
             <a:avLst/>
@@ -7139,14 +7139,29 @@
               </a:spcAft>
             </a:pPr>
             <a:r>
-              <a:rPr sz="2000" b="1" i="0">
+              <a:rPr sz="2000" b="1" i="0" dirty="0">
                 <a:solidFill>
                   <a:srgbClr val="1F1F1F"/>
                 </a:solidFill>
                 <a:latin typeface="Calibri"/>
               </a:rPr>
-              <a:t>15,897</a:t>
-            </a:r>
+              <a:t>15,8</a:t>
+            </a:r>
+            <a:r>
+              <a:rPr lang="en-US" sz="2000" b="1" i="0" dirty="0">
+                <a:solidFill>
+                  <a:srgbClr val="1F1F1F"/>
+                </a:solidFill>
+                <a:latin typeface="Calibri"/>
+              </a:rPr>
+              <a:t>83</a:t>
+            </a:r>
+            <a:endParaRPr sz="2000" b="1" i="0" dirty="0">
+              <a:solidFill>
+                <a:srgbClr val="1F1F1F"/>
+              </a:solidFill>
+              <a:latin typeface="Calibri"/>
+            </a:endParaRPr>
           </a:p>
         </p:txBody>
       </p:sp>
@@ -7290,7 +7305,7 @@
         <p:spPr>
           <a:xfrm>
             <a:off x="2441448" y="1563624"/>
-            <a:ext cx="2039112" cy="420624"/>
+            <a:ext cx="2039112" cy="307777"/>
           </a:xfrm>
           <a:prstGeom prst="rect">
             <a:avLst/>
@@ -7309,14 +7324,29 @@
               </a:spcAft>
             </a:pPr>
             <a:r>
-              <a:rPr sz="2000" b="1" i="0">
+              <a:rPr sz="2000" b="1" i="0" dirty="0">
                 <a:solidFill>
                   <a:srgbClr val="1F1F1F"/>
                 </a:solidFill>
                 <a:latin typeface="Calibri"/>
               </a:rPr>
-              <a:t>8,862</a:t>
-            </a:r>
+              <a:t>8,8</a:t>
+            </a:r>
+            <a:r>
+              <a:rPr lang="en-US" sz="2000" b="1" i="0" dirty="0">
+                <a:solidFill>
+                  <a:srgbClr val="1F1F1F"/>
+                </a:solidFill>
+                <a:latin typeface="Calibri"/>
+              </a:rPr>
+              <a:t>48</a:t>
+            </a:r>
+            <a:endParaRPr sz="2000" b="1" i="0" dirty="0">
+              <a:solidFill>
+                <a:srgbClr val="1F1F1F"/>
+              </a:solidFill>
+              <a:latin typeface="Calibri"/>
+            </a:endParaRPr>
           </a:p>
         </p:txBody>
       </p:sp>
@@ -7479,13 +7509,22 @@
               </a:spcAft>
             </a:pPr>
             <a:r>
+              <a:rPr lang="en-US" sz="2000" b="1" i="0" dirty="0">
+                <a:solidFill>
+                  <a:srgbClr val="1F1F1F"/>
+                </a:solidFill>
+                <a:latin typeface="Calibri"/>
+              </a:rPr>
+              <a:t>6</a:t>
+            </a:r>
+            <a:r>
               <a:rPr sz="2000" b="1" i="0" dirty="0">
                 <a:solidFill>
                   <a:srgbClr val="1F1F1F"/>
                 </a:solidFill>
                 <a:latin typeface="Calibri"/>
               </a:rPr>
-              <a:t>7,0</a:t>
+              <a:t>,</a:t>
             </a:r>
             <a:r>
               <a:rPr lang="en-US" sz="2000" b="1" i="0" dirty="0">
@@ -7494,17 +7533,14 @@
                 </a:solidFill>
                 <a:latin typeface="Calibri"/>
               </a:rPr>
-              <a:t>0</a:t>
-            </a:r>
-            <a:r>
-              <a:rPr sz="2000" b="1" i="0" dirty="0">
-                <a:solidFill>
-                  <a:srgbClr val="1F1F1F"/>
-                </a:solidFill>
-                <a:latin typeface="Calibri"/>
-              </a:rPr>
-              <a:t>5</a:t>
-            </a:r>
+              <a:t>991</a:t>
+            </a:r>
+            <a:endParaRPr sz="2000" b="1" i="0" dirty="0">
+              <a:solidFill>
+                <a:srgbClr val="1F1F1F"/>
+              </a:solidFill>
+              <a:latin typeface="Calibri"/>
+            </a:endParaRPr>
           </a:p>
         </p:txBody>
       </p:sp>
@@ -7736,7 +7772,7 @@
         <p:spPr>
           <a:xfrm>
             <a:off x="219456" y="2670048"/>
-            <a:ext cx="8705088" cy="201168"/>
+            <a:ext cx="8705088" cy="138499"/>
           </a:xfrm>
           <a:prstGeom prst="rect">
             <a:avLst/>
@@ -7755,13 +7791,49 @@
               </a:spcAft>
             </a:pPr>
             <a:r>
-              <a:rPr sz="900" b="1" i="0">
+              <a:rPr sz="900" b="1" i="0" dirty="0">
                 <a:solidFill>
                   <a:srgbClr val="1F1F1F"/>
                 </a:solidFill>
                 <a:latin typeface="Calibri"/>
               </a:rPr>
-              <a:t>On-corridor on-street supply by regulatory zone (7,005 spaces)</a:t>
+              <a:t>On-corridor on-street supply by regulatory zone (</a:t>
+            </a:r>
+            <a:r>
+              <a:rPr lang="en-US" sz="900" b="1" i="0" dirty="0">
+                <a:solidFill>
+                  <a:srgbClr val="1F1F1F"/>
+                </a:solidFill>
+                <a:latin typeface="Calibri"/>
+              </a:rPr>
+              <a:t>6</a:t>
+            </a:r>
+            <a:r>
+              <a:rPr sz="900" b="1" i="0" dirty="0">
+                <a:solidFill>
+                  <a:srgbClr val="1F1F1F"/>
+                </a:solidFill>
+                <a:latin typeface="Calibri"/>
+              </a:rPr>
+              <a:t>,</a:t>
+            </a:r>
+            <a:r>
+              <a:rPr lang="en-US" sz="900" b="1" i="0" dirty="0">
+                <a:solidFill>
+                  <a:srgbClr val="1F1F1F"/>
+                </a:solidFill>
+                <a:latin typeface="Calibri"/>
+              </a:rPr>
+              <a:t>991</a:t>
+            </a:r>
+            <a:r>
+              <a:rPr sz="900" b="1" i="0" dirty="0">
+                <a:solidFill>
+                  <a:srgbClr val="1F1F1F"/>
+                </a:solidFill>
+                <a:latin typeface="Calibri"/>
+              </a:rPr>
+              <a:t> spaces)</a:t>
             </a:r>
           </a:p>
         </p:txBody>
@@ -8168,7 +8240,7 @@
         <p:spPr>
           <a:xfrm>
             <a:off x="4727448" y="3300984"/>
-            <a:ext cx="1874519" cy="182880"/>
+            <a:ext cx="1874519" cy="123111"/>
           </a:xfrm>
           <a:prstGeom prst="rect">
             <a:avLst/>
@@ -8187,13 +8259,49 @@
               </a:spcAft>
             </a:pPr>
             <a:r>
-              <a:rPr sz="800" b="0" i="0">
+              <a:rPr sz="800" b="0" i="0" dirty="0">
                 <a:solidFill>
                   <a:srgbClr val="666666"/>
                 </a:solidFill>
                 <a:latin typeface="Calibri"/>
               </a:rPr>
-              <a:t>Zone A (red) – paid  260 (3.7%)</a:t>
+              <a:t>Zone A (red) – paid  </a:t>
+            </a:r>
+            <a:r>
+              <a:rPr lang="en-US" sz="800" b="0" i="0" dirty="0">
+                <a:solidFill>
+                  <a:srgbClr val="666666"/>
+                </a:solidFill>
+                <a:latin typeface="Calibri"/>
+              </a:rPr>
+              <a:t>246</a:t>
+            </a:r>
+            <a:r>
+              <a:rPr sz="800" b="0" i="0" dirty="0">
+                <a:solidFill>
+                  <a:srgbClr val="666666"/>
+                </a:solidFill>
+                <a:latin typeface="Calibri"/>
+              </a:rPr>
+              <a:t> (3.</a:t>
+            </a:r>
+            <a:r>
+              <a:rPr lang="en-US" sz="800" b="0" i="0" dirty="0">
+                <a:solidFill>
+                  <a:srgbClr val="666666"/>
+                </a:solidFill>
+                <a:latin typeface="Calibri"/>
+              </a:rPr>
+              <a:t>5</a:t>
+            </a:r>
+            <a:r>
+              <a:rPr sz="800" b="0" i="0" dirty="0">
+                <a:solidFill>
+                  <a:srgbClr val="666666"/>
+                </a:solidFill>
+                <a:latin typeface="Calibri"/>
+              </a:rPr>
+              <a:t>%)</a:t>
             </a:r>
           </a:p>
         </p:txBody>
@@ -14780,7 +14888,7 @@
         <p:spPr>
           <a:xfrm>
             <a:off x="4992624" y="1417320"/>
-            <a:ext cx="3931920" cy="182880"/>
+            <a:ext cx="3931920" cy="123111"/>
           </a:xfrm>
           <a:prstGeom prst="rect">
             <a:avLst/>
@@ -14799,13 +14907,49 @@
               </a:spcAft>
             </a:pPr>
             <a:r>
-              <a:rPr sz="800" b="0" i="0">
+              <a:rPr sz="800" b="0" i="0" dirty="0">
                 <a:solidFill>
                   <a:srgbClr val="666666"/>
                 </a:solidFill>
                 <a:latin typeface="Calibri"/>
               </a:rPr>
-              <a:t>Corridor 1: 1,836  ·  Corridor 2: 3,310  ·  Corridor 3: 807</a:t>
+              <a:t>Corridor 1: 1,</a:t>
+            </a:r>
+            <a:r>
+              <a:rPr lang="en-US" sz="800" b="0" i="0" dirty="0">
+                <a:solidFill>
+                  <a:srgbClr val="666666"/>
+                </a:solidFill>
+                <a:latin typeface="Calibri"/>
+              </a:rPr>
+              <a:t>494</a:t>
+            </a:r>
+            <a:r>
+              <a:rPr sz="800" b="0" i="0" dirty="0">
+                <a:solidFill>
+                  <a:srgbClr val="666666"/>
+                </a:solidFill>
+                <a:latin typeface="Calibri"/>
+              </a:rPr>
+              <a:t>  ·  Corridor 2: 3,</a:t>
+            </a:r>
+            <a:r>
+              <a:rPr lang="en-US" sz="800" dirty="0">
+                <a:solidFill>
+                  <a:srgbClr val="666666"/>
+                </a:solidFill>
+                <a:latin typeface="Calibri"/>
+              </a:rPr>
+              <a:t>395</a:t>
+            </a:r>
+            <a:r>
+              <a:rPr sz="800" b="0" i="0" dirty="0">
+                <a:solidFill>
+                  <a:srgbClr val="666666"/>
+                </a:solidFill>
+                <a:latin typeface="Calibri"/>
+              </a:rPr>
+              <a:t>  </a:t>
             </a:r>
           </a:p>
         </p:txBody>
@@ -14911,7 +15055,7 @@
         <p:spPr>
           <a:xfrm>
             <a:off x="219456" y="1719072"/>
-            <a:ext cx="2039112" cy="420624"/>
+            <a:ext cx="2039112" cy="276999"/>
           </a:xfrm>
           <a:prstGeom prst="rect">
             <a:avLst/>
@@ -14930,13 +15074,13 @@
               </a:spcAft>
             </a:pPr>
             <a:r>
-              <a:rPr sz="1700" b="1" i="0">
+              <a:rPr lang="en-US" b="1" dirty="0">
                 <a:solidFill>
                   <a:srgbClr val="1F1F1F"/>
                 </a:solidFill>
                 <a:latin typeface="Calibri"/>
               </a:rPr>
-              <a:t>7,005</a:t>
+              <a:t>6,991</a:t>
             </a:r>
           </a:p>
         </p:txBody>
@@ -15081,7 +15225,7 @@
         <p:spPr>
           <a:xfrm>
             <a:off x="2441448" y="1719072"/>
-            <a:ext cx="2039112" cy="420624"/>
+            <a:ext cx="2039112" cy="261610"/>
           </a:xfrm>
           <a:prstGeom prst="rect">
             <a:avLst/>
@@ -15100,14 +15244,38 @@
               </a:spcAft>
             </a:pPr>
             <a:r>
-              <a:rPr sz="1700" b="1" i="0">
+              <a:rPr lang="en-US" sz="1700" b="1" i="0" dirty="0">
                 <a:solidFill>
                   <a:srgbClr val="C62828"/>
                 </a:solidFill>
                 <a:latin typeface="Calibri"/>
               </a:rPr>
-              <a:t>5,953</a:t>
-            </a:r>
+              <a:t>4</a:t>
+            </a:r>
+            <a:r>
+              <a:rPr sz="1700" b="1" i="0" dirty="0">
+                <a:solidFill>
+                  <a:srgbClr val="C62828"/>
+                </a:solidFill>
+                <a:latin typeface="Calibri"/>
+              </a:rPr>
+              <a:t>,</a:t>
+            </a:r>
+            <a:r>
+              <a:rPr lang="en-US" sz="1700" b="1" i="0" dirty="0">
+                <a:solidFill>
+                  <a:srgbClr val="C62828"/>
+                </a:solidFill>
+                <a:latin typeface="Calibri"/>
+              </a:rPr>
+              <a:t>875</a:t>
+            </a:r>
+            <a:endParaRPr sz="1700" b="1" i="0" dirty="0">
+              <a:solidFill>
+                <a:srgbClr val="C62828"/>
+              </a:solidFill>
+              <a:latin typeface="Calibri"/>
+            </a:endParaRPr>
           </a:p>
         </p:txBody>
       </p:sp>
@@ -15251,7 +15419,7 @@
         <p:spPr>
           <a:xfrm>
             <a:off x="4663440" y="1719072"/>
-            <a:ext cx="2039112" cy="420624"/>
+            <a:ext cx="2039112" cy="261610"/>
           </a:xfrm>
           <a:prstGeom prst="rect">
             <a:avLst/>
@@ -15270,13 +15438,22 @@
               </a:spcAft>
             </a:pPr>
             <a:r>
-              <a:rPr sz="1700" b="1" i="0">
+              <a:rPr lang="en-US" sz="1700" b="1" dirty="0">
                 <a:solidFill>
                   <a:srgbClr val="C62828"/>
                 </a:solidFill>
                 <a:latin typeface="Calibri"/>
               </a:rPr>
-              <a:t>85%</a:t>
+              <a:t>70</a:t>
+            </a:r>
+            <a:r>
+              <a:rPr sz="1700" b="1" i="0" dirty="0">
+                <a:solidFill>
+                  <a:srgbClr val="C62828"/>
+                </a:solidFill>
+                <a:latin typeface="Calibri"/>
+              </a:rPr>
+              <a:t>%</a:t>
             </a:r>
           </a:p>
         </p:txBody>
@@ -15421,7 +15598,7 @@
         <p:spPr>
           <a:xfrm>
             <a:off x="6885432" y="1719072"/>
-            <a:ext cx="2039112" cy="420624"/>
+            <a:ext cx="2039112" cy="261610"/>
           </a:xfrm>
           <a:prstGeom prst="rect">
             <a:avLst/>
@@ -15440,14 +15617,38 @@
               </a:spcAft>
             </a:pPr>
             <a:r>
-              <a:rPr sz="1700" b="1" i="0">
+              <a:rPr lang="en-US" sz="1700" b="1" dirty="0">
                 <a:solidFill>
                   <a:srgbClr val="2E7D32"/>
                 </a:solidFill>
                 <a:latin typeface="Calibri"/>
               </a:rPr>
-              <a:t>1,052</a:t>
-            </a:r>
+              <a:t>2</a:t>
+            </a:r>
+            <a:r>
+              <a:rPr sz="1700" b="1" i="0" dirty="0">
+                <a:solidFill>
+                  <a:srgbClr val="2E7D32"/>
+                </a:solidFill>
+                <a:latin typeface="Calibri"/>
+              </a:rPr>
+              <a:t>,</a:t>
+            </a:r>
+            <a:r>
+              <a:rPr lang="en-US" sz="1700" b="1" i="0" dirty="0">
+                <a:solidFill>
+                  <a:srgbClr val="2E7D32"/>
+                </a:solidFill>
+                <a:latin typeface="Calibri"/>
+              </a:rPr>
+              <a:t>116</a:t>
+            </a:r>
+            <a:endParaRPr sz="1700" b="1" i="0" dirty="0">
+              <a:solidFill>
+                <a:srgbClr val="2E7D32"/>
+              </a:solidFill>
+              <a:latin typeface="Calibri"/>
+            </a:endParaRPr>
           </a:p>
         </p:txBody>
       </p:sp>
@@ -16254,7 +16455,25 @@
                 </a:solidFill>
                 <a:latin typeface="Calibri"/>
               </a:rPr>
-              <a:t>The 55% is that displaced demand set against the spaces removed in the same six areas (908 vehicles ÷ 1,643 spaces): the </a:t>
+              <a:t>The 55% is </a:t>
+            </a:r>
+            <a:r>
+              <a:rPr lang="en-US" sz="800" b="0" i="1" dirty="0">
+                <a:solidFill>
+                  <a:srgbClr val="666666"/>
+                </a:solidFill>
+                <a:latin typeface="Calibri"/>
+              </a:rPr>
+              <a:t>the</a:t>
+            </a:r>
+            <a:r>
+              <a:rPr sz="800" b="0" i="1" dirty="0">
+                <a:solidFill>
+                  <a:srgbClr val="666666"/>
+                </a:solidFill>
+                <a:latin typeface="Calibri"/>
+              </a:rPr>
+              <a:t> displaced demand set against the spaces removed in the same six areas (908 vehicles ÷ 1,643 spaces): the </a:t>
             </a:r>
             <a:r>
               <a:rPr sz="800" b="0" i="1" dirty="0" err="1">
@@ -16290,25 +16509,7 @@
                 </a:solidFill>
                 <a:latin typeface="Calibri"/>
               </a:rPr>
-              <a:t> so fewer vehicles need re-homing than spaces are lost. Corridor-wide removal and retention figures follow the current conceptual design and will be updated once that design is </a:t>
-            </a:r>
-            <a:r>
-              <a:rPr sz="800" b="0" i="1" dirty="0" err="1">
-                <a:solidFill>
-                  <a:srgbClr val="666666"/>
-                </a:solidFill>
-                <a:latin typeface="Calibri"/>
-              </a:rPr>
-              <a:t>finalised</a:t>
-            </a:r>
-            <a:r>
-              <a:rPr sz="800" b="0" i="1" dirty="0">
-                <a:solidFill>
-                  <a:srgbClr val="666666"/>
-                </a:solidFill>
-                <a:latin typeface="Calibri"/>
-              </a:rPr>
-              <a:t>.</a:t>
+              <a:t> so fewer vehicles need re-homing than spaces are lost. Corridor-wide removal and retention figures follow the current conceptual design and will be updated once that design is finalized.</a:t>
             </a:r>
           </a:p>
         </p:txBody>
@@ -17591,8 +17792,8 @@
         </p:nvSpPr>
         <p:spPr>
           <a:xfrm>
-            <a:off x="2889503" y="1751075"/>
-            <a:ext cx="1417320" cy="274320"/>
+            <a:off x="2889503" y="1815138"/>
+            <a:ext cx="1417320" cy="146194"/>
           </a:xfrm>
           <a:prstGeom prst="rect">
             <a:avLst/>
@@ -17606,7 +17807,7 @@
           <a:lstStyle/>
           <a:p>
             <a:r>
-              <a:rPr sz="950">
+              <a:rPr sz="950" dirty="0">
                 <a:solidFill>
                   <a:srgbClr val="1F1F1F"/>
                 </a:solidFill>
@@ -17614,14 +17815,11 @@
               </a:rPr>
               <a:t>Open residential yards</a:t>
             </a:r>
-            <a:r>
-              <a:rPr sz="650" b="1">
-                <a:solidFill>
-                  <a:srgbClr val="791F1F"/>
-                </a:solidFill>
-              </a:rPr>
-              <a:t>  PRECONDITION</a:t>
-            </a:r>
+            <a:endParaRPr sz="650" b="1" dirty="0">
+              <a:solidFill>
+                <a:srgbClr val="791F1F"/>
+              </a:solidFill>
+            </a:endParaRPr>
           </a:p>
         </p:txBody>
       </p:sp>
@@ -17773,8 +17971,8 @@
         </p:nvSpPr>
         <p:spPr>
           <a:xfrm>
-            <a:off x="4498848" y="1751075"/>
-            <a:ext cx="1417320" cy="274320"/>
+            <a:off x="4498848" y="1815138"/>
+            <a:ext cx="1417320" cy="146194"/>
           </a:xfrm>
           <a:prstGeom prst="rect">
             <a:avLst/>
@@ -17788,22 +17986,28 @@
           <a:lstStyle/>
           <a:p>
             <a:r>
-              <a:rPr sz="950">
+              <a:rPr sz="950" dirty="0">
                 <a:solidFill>
                   <a:srgbClr val="1F1F1F"/>
                 </a:solidFill>
                 <a:latin typeface="Calibri"/>
               </a:rPr>
-              <a:t>Visitor caps</a:t>
-            </a:r>
-            <a:r>
-              <a:rPr sz="650" b="1">
-                <a:solidFill>
-                  <a:srgbClr val="791F1F"/>
-                </a:solidFill>
-              </a:rPr>
-              <a:t>  CONTINGENCY</a:t>
-            </a:r>
+              <a:t>Visitor cap</a:t>
+            </a:r>
+            <a:r>
+              <a:rPr lang="en-US" sz="950" dirty="0">
+                <a:solidFill>
+                  <a:srgbClr val="1F1F1F"/>
+                </a:solidFill>
+                <a:latin typeface="Calibri"/>
+              </a:rPr>
+              <a:t>s</a:t>
+            </a:r>
+            <a:endParaRPr sz="650" b="1" dirty="0">
+              <a:solidFill>
+                <a:srgbClr val="791F1F"/>
+              </a:solidFill>
+            </a:endParaRPr>
           </a:p>
         </p:txBody>
       </p:sp>
